--- a/Xong/DoAn_Slide_Nhom5.pptx
+++ b/Xong/DoAn_Slide_Nhom5.pptx
@@ -123,6 +123,11 @@
       </a:defRPr>
     </a:lvl9pPr>
   </p:defaultTextStyle>
+  <p:extLst>
+    <p:ext uri="{EFAFB233-063F-42B5-8137-9DF3F51BA10A}">
+      <p15:sldGuideLst xmlns:p15="http://schemas.microsoft.com/office/powerpoint/2012/main"/>
+    </p:ext>
+  </p:extLst>
 </p:presentation>
 </file>
 
@@ -2981,11 +2986,6 @@
 <file path=ppt/slideLayouts/slideLayout1.xml><?xml version="1.0" encoding="utf-8"?>
 <p:sldLayout xmlns:a="http://schemas.openxmlformats.org/drawingml/2006/main" xmlns:r="http://schemas.openxmlformats.org/officeDocument/2006/relationships" xmlns:p="http://schemas.openxmlformats.org/presentationml/2006/main" preserve="1">
   <p:cSld name="DEFAULT">
-    <p:bg>
-      <p:bgRef idx="1001">
-        <a:schemeClr val="bg1"/>
-      </p:bgRef>
-    </p:bg>
     <p:spTree>
       <p:nvGrpSpPr>
         <p:cNvPr id="1" name=""/>
@@ -3293,14 +3293,6 @@
 <file path=ppt/slides/slide1.xml><?xml version="1.0" encoding="utf-8"?>
 <p:sld xmlns:a="http://schemas.openxmlformats.org/drawingml/2006/main" xmlns:r="http://schemas.openxmlformats.org/officeDocument/2006/relationships" xmlns:p="http://schemas.openxmlformats.org/presentationml/2006/main">
   <p:cSld name="Slide 1">
-    <p:bg>
-      <p:bgPr>
-        <a:solidFill>
-          <a:srgbClr val="1E2761"/>
-        </a:solidFill>
-        <a:effectLst/>
-      </p:bgPr>
-    </p:bg>
     <p:spTree>
       <p:nvGrpSpPr>
         <p:cNvPr id="1" name=""/>
@@ -3317,14 +3309,14 @@
       </p:grpSpPr>
       <p:sp>
         <p:nvSpPr>
-          <p:cNvPr id="2" name="Text 0"/>
+          <p:cNvPr id="3" name="Text 1"/>
           <p:cNvSpPr txBox="1"/>
           <p:nvPr/>
         </p:nvSpPr>
         <p:spPr>
           <a:xfrm>
-            <a:off x="640080" y="731520"/>
-            <a:ext cx="7863840" cy="274320"/>
+            <a:off x="640080" y="1965707"/>
+            <a:ext cx="7863840" cy="1325880"/>
           </a:xfrm>
           <a:prstGeom prst="rect">
             <a:avLst/>
@@ -3336,34 +3328,294 @@
           <a:bodyPr wrap="square" lIns="0" tIns="0" rIns="0" bIns="0" rtlCol="0" anchor="ctr"/>
           <a:lstStyle/>
           <a:p>
-            <a:pPr marL="0" indent="0">
+            <a:pPr marL="0" indent="0" algn="ctr">
+              <a:lnSpc>
+                <a:spcPts val="4000"/>
+              </a:lnSpc>
               <a:buNone/>
             </a:pPr>
             <a:r>
-              <a:rPr lang="en-US" sz="1150" b="1" kern="0" spc="180">
-                <a:solidFill>
-                  <a:srgbClr val="E08A1E"/>
-                </a:solidFill>
-                <a:latin typeface="Calibri" pitchFamily="34" charset="0"/>
-                <a:ea typeface="Calibri" pitchFamily="34" charset="-122"/>
-                <a:cs typeface="Calibri" pitchFamily="34" charset="-120"/>
-              </a:rPr>
-              <a:t>ĐỒ ÁN MÔN HỌC · CƠ SỞ HẠ TẦNG CÔNG NGHỆ THÔNG TIN</a:t>
-            </a:r>
-            <a:endParaRPr lang="en-US" sz="1150"/>
+              <a:rPr lang="en-US" sz="3600" b="1" dirty="0" err="1">
+                <a:solidFill>
+                  <a:srgbClr val="1E2761"/>
+                </a:solidFill>
+                <a:latin typeface="Cambria" pitchFamily="34" charset="0"/>
+                <a:ea typeface="Cambria" pitchFamily="34" charset="-122"/>
+                <a:cs typeface="Cambria" pitchFamily="34" charset="-120"/>
+              </a:rPr>
+              <a:t>Đề</a:t>
+            </a:r>
+            <a:r>
+              <a:rPr lang="en-US" sz="3600" b="1" dirty="0">
+                <a:solidFill>
+                  <a:srgbClr val="1E2761"/>
+                </a:solidFill>
+                <a:latin typeface="Cambria" pitchFamily="34" charset="0"/>
+                <a:ea typeface="Cambria" pitchFamily="34" charset="-122"/>
+                <a:cs typeface="Cambria" pitchFamily="34" charset="-120"/>
+              </a:rPr>
+              <a:t> </a:t>
+            </a:r>
+            <a:r>
+              <a:rPr lang="en-US" sz="3600" b="1" dirty="0" err="1">
+                <a:solidFill>
+                  <a:srgbClr val="1E2761"/>
+                </a:solidFill>
+                <a:latin typeface="Cambria" pitchFamily="34" charset="0"/>
+                <a:ea typeface="Cambria" pitchFamily="34" charset="-122"/>
+                <a:cs typeface="Cambria" pitchFamily="34" charset="-120"/>
+              </a:rPr>
+              <a:t>tài</a:t>
+            </a:r>
+            <a:r>
+              <a:rPr lang="en-US" sz="3600" b="1" dirty="0">
+                <a:solidFill>
+                  <a:srgbClr val="1E2761"/>
+                </a:solidFill>
+                <a:latin typeface="Cambria" pitchFamily="34" charset="0"/>
+                <a:ea typeface="Cambria" pitchFamily="34" charset="-122"/>
+                <a:cs typeface="Cambria" pitchFamily="34" charset="-120"/>
+              </a:rPr>
+              <a:t>: </a:t>
+            </a:r>
+            <a:r>
+              <a:rPr lang="en-US" sz="3600" b="1" dirty="0" err="1">
+                <a:solidFill>
+                  <a:srgbClr val="1E2761"/>
+                </a:solidFill>
+                <a:latin typeface="Cambria" pitchFamily="34" charset="0"/>
+                <a:ea typeface="Cambria" pitchFamily="34" charset="-122"/>
+                <a:cs typeface="Cambria" pitchFamily="34" charset="-120"/>
+              </a:rPr>
+              <a:t>Đề</a:t>
+            </a:r>
+            <a:r>
+              <a:rPr lang="en-US" sz="3600" b="1" dirty="0">
+                <a:solidFill>
+                  <a:srgbClr val="1E2761"/>
+                </a:solidFill>
+                <a:latin typeface="Cambria" pitchFamily="34" charset="0"/>
+                <a:ea typeface="Cambria" pitchFamily="34" charset="-122"/>
+                <a:cs typeface="Cambria" pitchFamily="34" charset="-120"/>
+              </a:rPr>
+              <a:t> </a:t>
+            </a:r>
+            <a:r>
+              <a:rPr lang="en-US" sz="3600" b="1" dirty="0" err="1">
+                <a:solidFill>
+                  <a:srgbClr val="1E2761"/>
+                </a:solidFill>
+                <a:latin typeface="Cambria" pitchFamily="34" charset="0"/>
+                <a:ea typeface="Cambria" pitchFamily="34" charset="-122"/>
+                <a:cs typeface="Cambria" pitchFamily="34" charset="-120"/>
+              </a:rPr>
+              <a:t>xuất</a:t>
+            </a:r>
+            <a:r>
+              <a:rPr lang="en-US" sz="3600" b="1" dirty="0">
+                <a:solidFill>
+                  <a:srgbClr val="1E2761"/>
+                </a:solidFill>
+                <a:latin typeface="Cambria" pitchFamily="34" charset="0"/>
+                <a:ea typeface="Cambria" pitchFamily="34" charset="-122"/>
+                <a:cs typeface="Cambria" pitchFamily="34" charset="-120"/>
+              </a:rPr>
+              <a:t> </a:t>
+            </a:r>
+            <a:r>
+              <a:rPr lang="en-US" sz="3600" b="1" dirty="0" err="1">
+                <a:solidFill>
+                  <a:srgbClr val="1E2761"/>
+                </a:solidFill>
+                <a:latin typeface="Cambria" pitchFamily="34" charset="0"/>
+                <a:ea typeface="Cambria" pitchFamily="34" charset="-122"/>
+                <a:cs typeface="Cambria" pitchFamily="34" charset="-120"/>
+              </a:rPr>
+              <a:t>đầu</a:t>
+            </a:r>
+            <a:r>
+              <a:rPr lang="en-US" sz="3600" b="1" dirty="0">
+                <a:solidFill>
+                  <a:srgbClr val="1E2761"/>
+                </a:solidFill>
+                <a:latin typeface="Cambria" pitchFamily="34" charset="0"/>
+                <a:ea typeface="Cambria" pitchFamily="34" charset="-122"/>
+                <a:cs typeface="Cambria" pitchFamily="34" charset="-120"/>
+              </a:rPr>
+              <a:t> </a:t>
+            </a:r>
+            <a:r>
+              <a:rPr lang="en-US" sz="3600" b="1" dirty="0" err="1">
+                <a:solidFill>
+                  <a:srgbClr val="1E2761"/>
+                </a:solidFill>
+                <a:latin typeface="Cambria" pitchFamily="34" charset="0"/>
+                <a:ea typeface="Cambria" pitchFamily="34" charset="-122"/>
+                <a:cs typeface="Cambria" pitchFamily="34" charset="-120"/>
+              </a:rPr>
+              <a:t>tư</a:t>
+            </a:r>
+            <a:r>
+              <a:rPr lang="en-US" sz="3600" dirty="0">
+                <a:solidFill>
+                  <a:srgbClr val="1E2761"/>
+                </a:solidFill>
+              </a:rPr>
+              <a:t> </a:t>
+            </a:r>
+            <a:r>
+              <a:rPr lang="en-US" sz="3600" b="1" dirty="0" err="1">
+                <a:solidFill>
+                  <a:srgbClr val="1E2761"/>
+                </a:solidFill>
+                <a:latin typeface="Cambria" pitchFamily="34" charset="0"/>
+                <a:ea typeface="Cambria" pitchFamily="34" charset="-122"/>
+                <a:cs typeface="Cambria" pitchFamily="34" charset="-120"/>
+              </a:rPr>
+              <a:t>hạ</a:t>
+            </a:r>
+            <a:r>
+              <a:rPr lang="en-US" sz="3600" b="1" dirty="0">
+                <a:solidFill>
+                  <a:srgbClr val="1E2761"/>
+                </a:solidFill>
+                <a:latin typeface="Cambria" pitchFamily="34" charset="0"/>
+                <a:ea typeface="Cambria" pitchFamily="34" charset="-122"/>
+                <a:cs typeface="Cambria" pitchFamily="34" charset="-120"/>
+              </a:rPr>
+              <a:t> </a:t>
+            </a:r>
+            <a:r>
+              <a:rPr lang="en-US" sz="3600" b="1" dirty="0" err="1">
+                <a:solidFill>
+                  <a:srgbClr val="1E2761"/>
+                </a:solidFill>
+                <a:latin typeface="Cambria" pitchFamily="34" charset="0"/>
+                <a:ea typeface="Cambria" pitchFamily="34" charset="-122"/>
+                <a:cs typeface="Cambria" pitchFamily="34" charset="-120"/>
+              </a:rPr>
+              <a:t>tầng</a:t>
+            </a:r>
+            <a:r>
+              <a:rPr lang="en-US" sz="3600" b="1" dirty="0">
+                <a:solidFill>
+                  <a:srgbClr val="1E2761"/>
+                </a:solidFill>
+                <a:latin typeface="Cambria" pitchFamily="34" charset="0"/>
+                <a:ea typeface="Cambria" pitchFamily="34" charset="-122"/>
+                <a:cs typeface="Cambria" pitchFamily="34" charset="-120"/>
+              </a:rPr>
+              <a:t> CNTT </a:t>
+            </a:r>
+            <a:r>
+              <a:rPr lang="en-US" sz="3600" b="1" dirty="0" err="1">
+                <a:solidFill>
+                  <a:srgbClr val="1E2761"/>
+                </a:solidFill>
+                <a:latin typeface="Cambria" pitchFamily="34" charset="0"/>
+                <a:ea typeface="Cambria" pitchFamily="34" charset="-122"/>
+                <a:cs typeface="Cambria" pitchFamily="34" charset="-120"/>
+              </a:rPr>
+              <a:t>cho</a:t>
+            </a:r>
+            <a:r>
+              <a:rPr lang="en-US" sz="3600" b="1" dirty="0">
+                <a:solidFill>
+                  <a:srgbClr val="1E2761"/>
+                </a:solidFill>
+                <a:latin typeface="Cambria" pitchFamily="34" charset="0"/>
+                <a:ea typeface="Cambria" pitchFamily="34" charset="-122"/>
+                <a:cs typeface="Cambria" pitchFamily="34" charset="-120"/>
+              </a:rPr>
+              <a:t> </a:t>
+            </a:r>
+            <a:r>
+              <a:rPr lang="en-US" sz="3600" b="1" dirty="0" err="1">
+                <a:solidFill>
+                  <a:srgbClr val="1E2761"/>
+                </a:solidFill>
+                <a:latin typeface="Cambria" pitchFamily="34" charset="0"/>
+                <a:ea typeface="Cambria" pitchFamily="34" charset="-122"/>
+                <a:cs typeface="Cambria" pitchFamily="34" charset="-120"/>
+              </a:rPr>
+              <a:t>chuỗi</a:t>
+            </a:r>
+            <a:r>
+              <a:rPr lang="en-US" sz="3600" b="1" dirty="0">
+                <a:solidFill>
+                  <a:srgbClr val="1E2761"/>
+                </a:solidFill>
+                <a:latin typeface="Cambria" pitchFamily="34" charset="0"/>
+                <a:ea typeface="Cambria" pitchFamily="34" charset="-122"/>
+                <a:cs typeface="Cambria" pitchFamily="34" charset="-120"/>
+              </a:rPr>
+              <a:t> Ways </a:t>
+            </a:r>
+            <a:r>
+              <a:rPr lang="en-US" sz="3600" b="1" dirty="0" err="1">
+                <a:solidFill>
+                  <a:srgbClr val="1E2761"/>
+                </a:solidFill>
+                <a:latin typeface="Cambria" pitchFamily="34" charset="0"/>
+                <a:ea typeface="Cambria" pitchFamily="34" charset="-122"/>
+                <a:cs typeface="Cambria" pitchFamily="34" charset="-120"/>
+              </a:rPr>
+              <a:t>Staytion</a:t>
+            </a:r>
+            <a:endParaRPr lang="en-US" sz="3600" dirty="0">
+              <a:solidFill>
+                <a:srgbClr val="1E2761"/>
+              </a:solidFill>
+            </a:endParaRPr>
           </a:p>
         </p:txBody>
       </p:sp>
+      <p:pic>
+        <p:nvPicPr>
+          <p:cNvPr id="15" name="Picture 14">
+            <a:extLst>
+              <a:ext uri="{FF2B5EF4-FFF2-40B4-BE49-F238E27FC236}">
+                <a16:creationId xmlns:a16="http://schemas.microsoft.com/office/drawing/2014/main" id="{3B42122D-D453-D0F5-9A55-55837FD17BC1}"/>
+              </a:ext>
+            </a:extLst>
+          </p:cNvPr>
+          <p:cNvPicPr>
+            <a:picLocks noChangeAspect="1"/>
+          </p:cNvPicPr>
+          <p:nvPr/>
+        </p:nvPicPr>
+        <p:blipFill>
+          <a:blip r:embed="rId3"/>
+          <a:stretch>
+            <a:fillRect/>
+          </a:stretch>
+        </p:blipFill>
+        <p:spPr>
+          <a:xfrm>
+            <a:off x="744158" y="129538"/>
+            <a:ext cx="1302204" cy="1325880"/>
+          </a:xfrm>
+          <a:prstGeom prst="rect">
+            <a:avLst/>
+          </a:prstGeom>
+        </p:spPr>
+      </p:pic>
       <p:sp>
         <p:nvSpPr>
-          <p:cNvPr id="3" name="Text 1"/>
+          <p:cNvPr id="17" name="Text 1">
+            <a:extLst>
+              <a:ext uri="{FF2B5EF4-FFF2-40B4-BE49-F238E27FC236}">
+                <a16:creationId xmlns:a16="http://schemas.microsoft.com/office/drawing/2014/main" id="{B3D3F226-0960-E575-938E-C83149D8C263}"/>
+              </a:ext>
+            </a:extLst>
+          </p:cNvPr>
           <p:cNvSpPr txBox="1"/>
           <p:nvPr/>
         </p:nvSpPr>
         <p:spPr>
           <a:xfrm>
-            <a:off x="640080" y="1143000"/>
-            <a:ext cx="7863840" cy="1325880"/>
+            <a:off x="2224070" y="153141"/>
+            <a:ext cx="6860455" cy="639337"/>
           </a:xfrm>
           <a:prstGeom prst="rect">
             <a:avLst/>
@@ -3382,50 +3634,84 @@
               <a:buNone/>
             </a:pPr>
             <a:r>
-              <a:rPr lang="en-US" sz="3600" b="1">
-                <a:solidFill>
-                  <a:srgbClr val="FFFFFF"/>
+              <a:rPr lang="en-US" sz="2000" b="1" dirty="0">
+                <a:solidFill>
+                  <a:srgbClr val="1E2761"/>
                 </a:solidFill>
                 <a:latin typeface="Cambria" pitchFamily="34" charset="0"/>
                 <a:ea typeface="Cambria" pitchFamily="34" charset="-122"/>
                 <a:cs typeface="Cambria" pitchFamily="34" charset="-120"/>
               </a:rPr>
-              <a:t>Đề xuất đầu tư</a:t>
-            </a:r>
-            <a:endParaRPr lang="en-US" sz="3600"/>
-          </a:p>
-          <a:p>
-            <a:pPr marL="0" indent="0">
-              <a:lnSpc>
-                <a:spcPts val="4000"/>
-              </a:lnSpc>
-              <a:buNone/>
-            </a:pPr>
-            <a:r>
-              <a:rPr lang="en-US" sz="3600" b="1">
-                <a:solidFill>
-                  <a:srgbClr val="FFFFFF"/>
+              <a:t>Trường </a:t>
+            </a:r>
+            <a:r>
+              <a:rPr lang="en-US" sz="2000" b="1" dirty="0" err="1">
+                <a:solidFill>
+                  <a:srgbClr val="1E2761"/>
                 </a:solidFill>
                 <a:latin typeface="Cambria" pitchFamily="34" charset="0"/>
                 <a:ea typeface="Cambria" pitchFamily="34" charset="-122"/>
                 <a:cs typeface="Cambria" pitchFamily="34" charset="-120"/>
               </a:rPr>
-              <a:t>hạ tầng CNTT</a:t>
-            </a:r>
-            <a:endParaRPr lang="en-US" sz="3600"/>
+              <a:t>Đại</a:t>
+            </a:r>
+            <a:r>
+              <a:rPr lang="en-US" sz="2000" b="1" dirty="0">
+                <a:solidFill>
+                  <a:srgbClr val="1E2761"/>
+                </a:solidFill>
+                <a:latin typeface="Cambria" pitchFamily="34" charset="0"/>
+                <a:ea typeface="Cambria" pitchFamily="34" charset="-122"/>
+                <a:cs typeface="Cambria" pitchFamily="34" charset="-120"/>
+              </a:rPr>
+              <a:t> Học Công </a:t>
+            </a:r>
+            <a:r>
+              <a:rPr lang="en-US" sz="2000" b="1" dirty="0" err="1">
+                <a:solidFill>
+                  <a:srgbClr val="1E2761"/>
+                </a:solidFill>
+                <a:latin typeface="Cambria" pitchFamily="34" charset="0"/>
+                <a:ea typeface="Cambria" pitchFamily="34" charset="-122"/>
+                <a:cs typeface="Cambria" pitchFamily="34" charset="-120"/>
+              </a:rPr>
+              <a:t>Nghệ</a:t>
+            </a:r>
+            <a:r>
+              <a:rPr lang="en-US" sz="2000" b="1" dirty="0">
+                <a:solidFill>
+                  <a:srgbClr val="1E2761"/>
+                </a:solidFill>
+                <a:latin typeface="Cambria" pitchFamily="34" charset="0"/>
+                <a:ea typeface="Cambria" pitchFamily="34" charset="-122"/>
+                <a:cs typeface="Cambria" pitchFamily="34" charset="-120"/>
+              </a:rPr>
+              <a:t> Thông Tin - ĐHQG - HCM </a:t>
+            </a:r>
+            <a:endParaRPr lang="en-US" sz="2000" dirty="0">
+              <a:solidFill>
+                <a:srgbClr val="1E2761"/>
+              </a:solidFill>
+            </a:endParaRPr>
           </a:p>
         </p:txBody>
       </p:sp>
       <p:sp>
         <p:nvSpPr>
-          <p:cNvPr id="4" name="Text 2"/>
+          <p:cNvPr id="19" name="Text 1">
+            <a:extLst>
+              <a:ext uri="{FF2B5EF4-FFF2-40B4-BE49-F238E27FC236}">
+                <a16:creationId xmlns:a16="http://schemas.microsoft.com/office/drawing/2014/main" id="{3744A489-9FE3-B7C7-60CC-BA89A3DF65A1}"/>
+              </a:ext>
+            </a:extLst>
+          </p:cNvPr>
           <p:cNvSpPr txBox="1"/>
           <p:nvPr/>
         </p:nvSpPr>
         <p:spPr>
           <a:xfrm>
-            <a:off x="640080" y="2606040"/>
-            <a:ext cx="7863840" cy="640080"/>
+            <a:off x="2224071" y="596272"/>
+            <a:ext cx="6860455" cy="639337"/>
           </a:xfrm>
           <a:prstGeom prst="rect">
             <a:avLst/>
@@ -3438,237 +3724,112 @@
           <a:lstStyle/>
           <a:p>
             <a:pPr marL="0" indent="0">
+              <a:lnSpc>
+                <a:spcPts val="4000"/>
+              </a:lnSpc>
               <a:buNone/>
             </a:pPr>
             <a:r>
-              <a:rPr lang="en-US" sz="1400">
-                <a:solidFill>
-                  <a:srgbClr val="CADCFC"/>
-                </a:solidFill>
-                <a:latin typeface="Calibri" pitchFamily="34" charset="0"/>
-                <a:ea typeface="Calibri" pitchFamily="34" charset="-122"/>
-                <a:cs typeface="Calibri" pitchFamily="34" charset="-120"/>
-              </a:rPr>
-              <a:t>Đầu tư nền tảng tích hợp ứng dụng và nền tảng dữ liệu tập trung cho chuỗi Ways Station</a:t>
-            </a:r>
-            <a:endParaRPr lang="en-US" sz="1400"/>
+              <a:rPr lang="en-US" sz="2000" b="1" dirty="0">
+                <a:solidFill>
+                  <a:srgbClr val="1E2761"/>
+                </a:solidFill>
+                <a:latin typeface="Cambria" pitchFamily="34" charset="0"/>
+                <a:ea typeface="Cambria" pitchFamily="34" charset="-122"/>
+                <a:cs typeface="Cambria" pitchFamily="34" charset="-120"/>
+              </a:rPr>
+              <a:t>Trung Tâm </a:t>
+            </a:r>
+            <a:r>
+              <a:rPr lang="en-US" sz="2000" b="1" dirty="0" err="1">
+                <a:solidFill>
+                  <a:srgbClr val="1E2761"/>
+                </a:solidFill>
+                <a:latin typeface="Cambria" pitchFamily="34" charset="0"/>
+                <a:ea typeface="Cambria" pitchFamily="34" charset="-122"/>
+                <a:cs typeface="Cambria" pitchFamily="34" charset="-120"/>
+              </a:rPr>
+              <a:t>Phát</a:t>
+            </a:r>
+            <a:r>
+              <a:rPr lang="en-US" sz="2000" b="1" dirty="0">
+                <a:solidFill>
+                  <a:srgbClr val="1E2761"/>
+                </a:solidFill>
+                <a:latin typeface="Cambria" pitchFamily="34" charset="0"/>
+                <a:ea typeface="Cambria" pitchFamily="34" charset="-122"/>
+                <a:cs typeface="Cambria" pitchFamily="34" charset="-120"/>
+              </a:rPr>
+              <a:t> </a:t>
+            </a:r>
+            <a:r>
+              <a:rPr lang="en-US" sz="2000" b="1" dirty="0" err="1">
+                <a:solidFill>
+                  <a:srgbClr val="1E2761"/>
+                </a:solidFill>
+                <a:latin typeface="Cambria" pitchFamily="34" charset="0"/>
+                <a:ea typeface="Cambria" pitchFamily="34" charset="-122"/>
+                <a:cs typeface="Cambria" pitchFamily="34" charset="-120"/>
+              </a:rPr>
+              <a:t>Triển</a:t>
+            </a:r>
+            <a:r>
+              <a:rPr lang="en-US" sz="2000" b="1" dirty="0">
+                <a:solidFill>
+                  <a:srgbClr val="1E2761"/>
+                </a:solidFill>
+                <a:latin typeface="Cambria" pitchFamily="34" charset="0"/>
+                <a:ea typeface="Cambria" pitchFamily="34" charset="-122"/>
+                <a:cs typeface="Cambria" pitchFamily="34" charset="-120"/>
+              </a:rPr>
+              <a:t> Công </a:t>
+            </a:r>
+            <a:r>
+              <a:rPr lang="en-US" sz="2000" b="1" dirty="0" err="1">
+                <a:solidFill>
+                  <a:srgbClr val="1E2761"/>
+                </a:solidFill>
+                <a:latin typeface="Cambria" pitchFamily="34" charset="0"/>
+                <a:ea typeface="Cambria" pitchFamily="34" charset="-122"/>
+                <a:cs typeface="Cambria" pitchFamily="34" charset="-120"/>
+              </a:rPr>
+              <a:t>Nghệ</a:t>
+            </a:r>
+            <a:r>
+              <a:rPr lang="en-US" sz="2000" b="1" dirty="0">
+                <a:solidFill>
+                  <a:srgbClr val="1E2761"/>
+                </a:solidFill>
+                <a:latin typeface="Cambria" pitchFamily="34" charset="0"/>
+                <a:ea typeface="Cambria" pitchFamily="34" charset="-122"/>
+                <a:cs typeface="Cambria" pitchFamily="34" charset="-120"/>
+              </a:rPr>
+              <a:t> Thông tin</a:t>
+            </a:r>
+            <a:endParaRPr lang="en-US" sz="2000" dirty="0">
+              <a:solidFill>
+                <a:srgbClr val="1E2761"/>
+              </a:solidFill>
+            </a:endParaRPr>
           </a:p>
         </p:txBody>
       </p:sp>
       <p:sp>
         <p:nvSpPr>
-          <p:cNvPr id="5" name="Shape 3"/>
-          <p:cNvSpPr/>
-          <p:nvPr/>
-        </p:nvSpPr>
-        <p:spPr>
-          <a:xfrm>
-            <a:off x="640080" y="3383280"/>
-            <a:ext cx="2514600" cy="566928"/>
-          </a:xfrm>
-          <a:prstGeom prst="roundRect">
-            <a:avLst>
-              <a:gd name="adj" fmla="val 8065"/>
-            </a:avLst>
-          </a:prstGeom>
-          <a:solidFill>
-            <a:srgbClr val="34468C"/>
-          </a:solidFill>
-          <a:ln/>
-        </p:spPr>
-        <p:txBody>
-          <a:bodyPr/>
-          <a:lstStyle/>
-          <a:p>
-            <a:endParaRPr lang="en-US"/>
-          </a:p>
-        </p:txBody>
-      </p:sp>
-      <p:sp>
-        <p:nvSpPr>
-          <p:cNvPr id="6" name="Text 4"/>
+          <p:cNvPr id="21" name="Text 1">
+            <a:extLst>
+              <a:ext uri="{FF2B5EF4-FFF2-40B4-BE49-F238E27FC236}">
+                <a16:creationId xmlns:a16="http://schemas.microsoft.com/office/drawing/2014/main" id="{D4265826-4419-AD44-436A-C7324944D8C4}"/>
+              </a:ext>
+            </a:extLst>
+          </p:cNvPr>
           <p:cNvSpPr txBox="1"/>
           <p:nvPr/>
         </p:nvSpPr>
         <p:spPr>
           <a:xfrm>
-            <a:off x="640080" y="3383280"/>
-            <a:ext cx="2514600" cy="566928"/>
-          </a:xfrm>
-          <a:prstGeom prst="rect">
-            <a:avLst/>
-          </a:prstGeom>
-          <a:noFill/>
-          <a:ln/>
-        </p:spPr>
-        <p:txBody>
-          <a:bodyPr wrap="square" lIns="0" tIns="0" rIns="0" bIns="0" rtlCol="0" anchor="ctr"/>
-          <a:lstStyle/>
-          <a:p>
-            <a:pPr marL="0" indent="0" algn="ctr">
-              <a:buNone/>
-            </a:pPr>
-            <a:r>
-              <a:rPr lang="en-US" sz="1150">
-                <a:solidFill>
-                  <a:srgbClr val="FFFFFF"/>
-                </a:solidFill>
-                <a:latin typeface="Calibri" pitchFamily="34" charset="0"/>
-                <a:ea typeface="Calibri" pitchFamily="34" charset="-122"/>
-                <a:cs typeface="Calibri" pitchFamily="34" charset="-120"/>
-              </a:rPr>
-              <a:t>CAPEX 1,309 tỷ</a:t>
-            </a:r>
-            <a:endParaRPr lang="en-US" sz="1150"/>
-          </a:p>
-        </p:txBody>
-      </p:sp>
-      <p:sp>
-        <p:nvSpPr>
-          <p:cNvPr id="7" name="Shape 5"/>
-          <p:cNvSpPr/>
-          <p:nvPr/>
-        </p:nvSpPr>
-        <p:spPr>
-          <a:xfrm>
-            <a:off x="3337560" y="3383280"/>
-            <a:ext cx="2514600" cy="566928"/>
-          </a:xfrm>
-          <a:prstGeom prst="roundRect">
-            <a:avLst>
-              <a:gd name="adj" fmla="val 8065"/>
-            </a:avLst>
-          </a:prstGeom>
-          <a:solidFill>
-            <a:srgbClr val="34468C"/>
-          </a:solidFill>
-          <a:ln/>
-        </p:spPr>
-        <p:txBody>
-          <a:bodyPr/>
-          <a:lstStyle/>
-          <a:p>
-            <a:endParaRPr lang="en-US"/>
-          </a:p>
-        </p:txBody>
-      </p:sp>
-      <p:sp>
-        <p:nvSpPr>
-          <p:cNvPr id="8" name="Text 6"/>
-          <p:cNvSpPr txBox="1"/>
-          <p:nvPr/>
-        </p:nvSpPr>
-        <p:spPr>
-          <a:xfrm>
-            <a:off x="3337560" y="3383280"/>
-            <a:ext cx="2514600" cy="566928"/>
-          </a:xfrm>
-          <a:prstGeom prst="rect">
-            <a:avLst/>
-          </a:prstGeom>
-          <a:noFill/>
-          <a:ln/>
-        </p:spPr>
-        <p:txBody>
-          <a:bodyPr wrap="square" lIns="0" tIns="0" rIns="0" bIns="0" rtlCol="0" anchor="ctr"/>
-          <a:lstStyle/>
-          <a:p>
-            <a:pPr marL="0" indent="0" algn="ctr">
-              <a:buNone/>
-            </a:pPr>
-            <a:r>
-              <a:rPr lang="en-US" sz="1150">
-                <a:solidFill>
-                  <a:srgbClr val="FFFFFF"/>
-                </a:solidFill>
-                <a:latin typeface="Calibri" pitchFamily="34" charset="0"/>
-                <a:ea typeface="Calibri" pitchFamily="34" charset="-122"/>
-                <a:cs typeface="Calibri" pitchFamily="34" charset="-120"/>
-              </a:rPr>
-              <a:t>TCO 3 năm 5,209 tỷ</a:t>
-            </a:r>
-            <a:endParaRPr lang="en-US" sz="1150"/>
-          </a:p>
-        </p:txBody>
-      </p:sp>
-      <p:sp>
-        <p:nvSpPr>
-          <p:cNvPr id="9" name="Shape 7"/>
-          <p:cNvSpPr/>
-          <p:nvPr/>
-        </p:nvSpPr>
-        <p:spPr>
-          <a:xfrm>
-            <a:off x="6035040" y="3383280"/>
-            <a:ext cx="2514600" cy="566928"/>
-          </a:xfrm>
-          <a:prstGeom prst="roundRect">
-            <a:avLst>
-              <a:gd name="adj" fmla="val 8065"/>
-            </a:avLst>
-          </a:prstGeom>
-          <a:solidFill>
-            <a:srgbClr val="34468C"/>
-          </a:solidFill>
-          <a:ln/>
-        </p:spPr>
-        <p:txBody>
-          <a:bodyPr/>
-          <a:lstStyle/>
-          <a:p>
-            <a:endParaRPr lang="en-US"/>
-          </a:p>
-        </p:txBody>
-      </p:sp>
-      <p:sp>
-        <p:nvSpPr>
-          <p:cNvPr id="10" name="Text 8"/>
-          <p:cNvSpPr txBox="1"/>
-          <p:nvPr/>
-        </p:nvSpPr>
-        <p:spPr>
-          <a:xfrm>
-            <a:off x="6035040" y="3383280"/>
-            <a:ext cx="2514600" cy="566928"/>
-          </a:xfrm>
-          <a:prstGeom prst="rect">
-            <a:avLst/>
-          </a:prstGeom>
-          <a:noFill/>
-          <a:ln/>
-        </p:spPr>
-        <p:txBody>
-          <a:bodyPr wrap="square" lIns="0" tIns="0" rIns="0" bIns="0" rtlCol="0" anchor="ctr"/>
-          <a:lstStyle/>
-          <a:p>
-            <a:pPr marL="0" indent="0" algn="ctr">
-              <a:buNone/>
-            </a:pPr>
-            <a:r>
-              <a:rPr lang="en-US" sz="1150">
-                <a:solidFill>
-                  <a:srgbClr val="FFFFFF"/>
-                </a:solidFill>
-                <a:latin typeface="Calibri" pitchFamily="34" charset="0"/>
-                <a:ea typeface="Calibri" pitchFamily="34" charset="-122"/>
-                <a:cs typeface="Calibri" pitchFamily="34" charset="-120"/>
-              </a:rPr>
-              <a:t>Triển khai 16 tuần</a:t>
-            </a:r>
-            <a:endParaRPr lang="en-US" sz="1150"/>
-          </a:p>
-        </p:txBody>
-      </p:sp>
-      <p:sp>
-        <p:nvSpPr>
-          <p:cNvPr id="11" name="Text 9"/>
-          <p:cNvSpPr txBox="1"/>
-          <p:nvPr/>
-        </p:nvSpPr>
-        <p:spPr>
-          <a:xfrm>
-            <a:off x="640080" y="4206240"/>
-            <a:ext cx="7863840" cy="274320"/>
+            <a:off x="2929796" y="3873004"/>
+            <a:ext cx="6860455" cy="639337"/>
           </a:xfrm>
           <a:prstGeom prst="rect">
             <a:avLst/>
@@ -3681,20 +3842,27 @@
           <a:lstStyle/>
           <a:p>
             <a:pPr marL="0" indent="0">
+              <a:lnSpc>
+                <a:spcPts val="4000"/>
+              </a:lnSpc>
               <a:buNone/>
             </a:pPr>
             <a:r>
-              <a:rPr lang="en-US" sz="1200">
-                <a:solidFill>
-                  <a:srgbClr val="CADCFC"/>
-                </a:solidFill>
-                <a:latin typeface="Calibri" pitchFamily="34" charset="0"/>
-                <a:ea typeface="Calibri" pitchFamily="34" charset="-122"/>
-                <a:cs typeface="Calibri" pitchFamily="34" charset="-120"/>
-              </a:rPr>
-              <a:t>Nhóm 5  ·  34 chi nhánh  ·  TP. Hồ Chí Minh</a:t>
-            </a:r>
-            <a:endParaRPr lang="en-US" sz="1200"/>
+              <a:rPr lang="en-US" sz="2000" b="1" dirty="0">
+                <a:solidFill>
+                  <a:srgbClr val="1E2761"/>
+                </a:solidFill>
+                <a:latin typeface="Cambria" pitchFamily="34" charset="0"/>
+                <a:ea typeface="Cambria" pitchFamily="34" charset="-122"/>
+                <a:cs typeface="Cambria" pitchFamily="34" charset="-120"/>
+              </a:rPr>
+              <a:t>GVHD: Nguyễn Thị Anh Thư</a:t>
+            </a:r>
+            <a:endParaRPr lang="en-US" sz="2000" dirty="0">
+              <a:solidFill>
+                <a:srgbClr val="1E2761"/>
+              </a:solidFill>
+            </a:endParaRPr>
           </a:p>
         </p:txBody>
       </p:sp>
@@ -3709,14 +3877,6 @@
 <file path=ppt/slides/slide10.xml><?xml version="1.0" encoding="utf-8"?>
 <p:sld xmlns:a="http://schemas.openxmlformats.org/drawingml/2006/main" xmlns:r="http://schemas.openxmlformats.org/officeDocument/2006/relationships" xmlns:p="http://schemas.openxmlformats.org/presentationml/2006/main">
   <p:cSld name="Slide 10">
-    <p:bg>
-      <p:bgPr>
-        <a:solidFill>
-          <a:srgbClr val="FFFFFF"/>
-        </a:solidFill>
-        <a:effectLst/>
-      </p:bgPr>
-    </p:bg>
     <p:spTree>
       <p:nvGrpSpPr>
         <p:cNvPr id="1" name=""/>
@@ -6758,14 +6918,6 @@
 <file path=ppt/slides/slide11.xml><?xml version="1.0" encoding="utf-8"?>
 <p:sld xmlns:a="http://schemas.openxmlformats.org/drawingml/2006/main" xmlns:r="http://schemas.openxmlformats.org/officeDocument/2006/relationships" xmlns:p="http://schemas.openxmlformats.org/presentationml/2006/main">
   <p:cSld name="Slide 11">
-    <p:bg>
-      <p:bgPr>
-        <a:solidFill>
-          <a:srgbClr val="FFFFFF"/>
-        </a:solidFill>
-        <a:effectLst/>
-      </p:bgPr>
-    </p:bg>
     <p:spTree>
       <p:nvGrpSpPr>
         <p:cNvPr id="1" name=""/>
@@ -8256,14 +8408,6 @@
 <file path=ppt/slides/slide12.xml><?xml version="1.0" encoding="utf-8"?>
 <p:sld xmlns:a="http://schemas.openxmlformats.org/drawingml/2006/main" xmlns:r="http://schemas.openxmlformats.org/officeDocument/2006/relationships" xmlns:p="http://schemas.openxmlformats.org/presentationml/2006/main">
   <p:cSld name="Slide 12">
-    <p:bg>
-      <p:bgPr>
-        <a:solidFill>
-          <a:srgbClr val="FFFFFF"/>
-        </a:solidFill>
-        <a:effectLst/>
-      </p:bgPr>
-    </p:bg>
     <p:spTree>
       <p:nvGrpSpPr>
         <p:cNvPr id="1" name=""/>
@@ -10544,14 +10688,6 @@
 <file path=ppt/slides/slide13.xml><?xml version="1.0" encoding="utf-8"?>
 <p:sld xmlns:a="http://schemas.openxmlformats.org/drawingml/2006/main" xmlns:r="http://schemas.openxmlformats.org/officeDocument/2006/relationships" xmlns:p="http://schemas.openxmlformats.org/presentationml/2006/main">
   <p:cSld name="Slide 13">
-    <p:bg>
-      <p:bgPr>
-        <a:solidFill>
-          <a:srgbClr val="FFFFFF"/>
-        </a:solidFill>
-        <a:effectLst/>
-      </p:bgPr>
-    </p:bg>
     <p:spTree>
       <p:nvGrpSpPr>
         <p:cNvPr id="1" name=""/>
@@ -12879,14 +13015,6 @@
 <file path=ppt/slides/slide14.xml><?xml version="1.0" encoding="utf-8"?>
 <p:sld xmlns:a="http://schemas.openxmlformats.org/drawingml/2006/main" xmlns:r="http://schemas.openxmlformats.org/officeDocument/2006/relationships" xmlns:p="http://schemas.openxmlformats.org/presentationml/2006/main">
   <p:cSld name="Slide 14">
-    <p:bg>
-      <p:bgPr>
-        <a:solidFill>
-          <a:srgbClr val="FFFFFF"/>
-        </a:solidFill>
-        <a:effectLst/>
-      </p:bgPr>
-    </p:bg>
     <p:spTree>
       <p:nvGrpSpPr>
         <p:cNvPr id="1" name=""/>
@@ -14107,14 +14235,6 @@
 <file path=ppt/slides/slide15.xml><?xml version="1.0" encoding="utf-8"?>
 <p:sld xmlns:a="http://schemas.openxmlformats.org/drawingml/2006/main" xmlns:r="http://schemas.openxmlformats.org/officeDocument/2006/relationships" xmlns:p="http://schemas.openxmlformats.org/presentationml/2006/main">
   <p:cSld name="Slide 15">
-    <p:bg>
-      <p:bgPr>
-        <a:solidFill>
-          <a:srgbClr val="FFFFFF"/>
-        </a:solidFill>
-        <a:effectLst/>
-      </p:bgPr>
-    </p:bg>
     <p:spTree>
       <p:nvGrpSpPr>
         <p:cNvPr id="1" name=""/>
@@ -15463,14 +15583,6 @@
 <file path=ppt/slides/slide16.xml><?xml version="1.0" encoding="utf-8"?>
 <p:sld xmlns:a="http://schemas.openxmlformats.org/drawingml/2006/main" xmlns:r="http://schemas.openxmlformats.org/officeDocument/2006/relationships" xmlns:p="http://schemas.openxmlformats.org/presentationml/2006/main">
   <p:cSld name="Slide 16">
-    <p:bg>
-      <p:bgPr>
-        <a:solidFill>
-          <a:srgbClr val="FFFFFF"/>
-        </a:solidFill>
-        <a:effectLst/>
-      </p:bgPr>
-    </p:bg>
     <p:spTree>
       <p:nvGrpSpPr>
         <p:cNvPr id="1" name=""/>
@@ -16212,14 +16324,6 @@
 <file path=ppt/slides/slide17.xml><?xml version="1.0" encoding="utf-8"?>
 <p:sld xmlns:a="http://schemas.openxmlformats.org/drawingml/2006/main" xmlns:r="http://schemas.openxmlformats.org/officeDocument/2006/relationships" xmlns:p="http://schemas.openxmlformats.org/presentationml/2006/main">
   <p:cSld name="Slide 17">
-    <p:bg>
-      <p:bgPr>
-        <a:solidFill>
-          <a:srgbClr val="FFFFFF"/>
-        </a:solidFill>
-        <a:effectLst/>
-      </p:bgPr>
-    </p:bg>
     <p:spTree>
       <p:nvGrpSpPr>
         <p:cNvPr id="1" name=""/>
@@ -16641,14 +16745,6 @@
 <file path=ppt/slides/slide18.xml><?xml version="1.0" encoding="utf-8"?>
 <p:sld xmlns:a="http://schemas.openxmlformats.org/drawingml/2006/main" xmlns:r="http://schemas.openxmlformats.org/officeDocument/2006/relationships" xmlns:p="http://schemas.openxmlformats.org/presentationml/2006/main">
   <p:cSld name="Slide 18">
-    <p:bg>
-      <p:bgPr>
-        <a:solidFill>
-          <a:srgbClr val="FFFFFF"/>
-        </a:solidFill>
-        <a:effectLst/>
-      </p:bgPr>
-    </p:bg>
     <p:spTree>
       <p:nvGrpSpPr>
         <p:cNvPr id="1" name=""/>
@@ -18121,14 +18217,6 @@
 <file path=ppt/slides/slide19.xml><?xml version="1.0" encoding="utf-8"?>
 <p:sld xmlns:a="http://schemas.openxmlformats.org/drawingml/2006/main" xmlns:r="http://schemas.openxmlformats.org/officeDocument/2006/relationships" xmlns:p="http://schemas.openxmlformats.org/presentationml/2006/main">
   <p:cSld name="Slide 19">
-    <p:bg>
-      <p:bgPr>
-        <a:solidFill>
-          <a:srgbClr val="FFFFFF"/>
-        </a:solidFill>
-        <a:effectLst/>
-      </p:bgPr>
-    </p:bg>
     <p:spTree>
       <p:nvGrpSpPr>
         <p:cNvPr id="1" name=""/>
@@ -19852,14 +19940,6 @@
 <file path=ppt/slides/slide2.xml><?xml version="1.0" encoding="utf-8"?>
 <p:sld xmlns:a="http://schemas.openxmlformats.org/drawingml/2006/main" xmlns:r="http://schemas.openxmlformats.org/officeDocument/2006/relationships" xmlns:p="http://schemas.openxmlformats.org/presentationml/2006/main">
   <p:cSld name="Slide 2">
-    <p:bg>
-      <p:bgPr>
-        <a:solidFill>
-          <a:srgbClr val="FFFFFF"/>
-        </a:solidFill>
-        <a:effectLst/>
-      </p:bgPr>
-    </p:bg>
     <p:spTree>
       <p:nvGrpSpPr>
         <p:cNvPr id="1" name=""/>
@@ -22558,14 +22638,6 @@
 <file path=ppt/slides/slide20.xml><?xml version="1.0" encoding="utf-8"?>
 <p:sld xmlns:a="http://schemas.openxmlformats.org/drawingml/2006/main" xmlns:r="http://schemas.openxmlformats.org/officeDocument/2006/relationships" xmlns:p="http://schemas.openxmlformats.org/presentationml/2006/main">
   <p:cSld name="Slide 20">
-    <p:bg>
-      <p:bgPr>
-        <a:solidFill>
-          <a:srgbClr val="1E2761"/>
-        </a:solidFill>
-        <a:effectLst/>
-      </p:bgPr>
-    </p:bg>
     <p:spTree>
       <p:nvGrpSpPr>
         <p:cNvPr id="1" name=""/>
@@ -23245,14 +23317,6 @@
 <file path=ppt/slides/slide3.xml><?xml version="1.0" encoding="utf-8"?>
 <p:sld xmlns:a="http://schemas.openxmlformats.org/drawingml/2006/main" xmlns:r="http://schemas.openxmlformats.org/officeDocument/2006/relationships" xmlns:p="http://schemas.openxmlformats.org/presentationml/2006/main">
   <p:cSld name="Slide 3">
-    <p:bg>
-      <p:bgPr>
-        <a:solidFill>
-          <a:srgbClr val="FFFFFF"/>
-        </a:solidFill>
-        <a:effectLst/>
-      </p:bgPr>
-    </p:bg>
     <p:spTree>
       <p:nvGrpSpPr>
         <p:cNvPr id="1" name=""/>
@@ -25228,14 +25292,6 @@
 <file path=ppt/slides/slide4.xml><?xml version="1.0" encoding="utf-8"?>
 <p:sld xmlns:a="http://schemas.openxmlformats.org/drawingml/2006/main" xmlns:r="http://schemas.openxmlformats.org/officeDocument/2006/relationships" xmlns:p="http://schemas.openxmlformats.org/presentationml/2006/main">
   <p:cSld name="Slide 4">
-    <p:bg>
-      <p:bgPr>
-        <a:solidFill>
-          <a:srgbClr val="FFFFFF"/>
-        </a:solidFill>
-        <a:effectLst/>
-      </p:bgPr>
-    </p:bg>
     <p:spTree>
       <p:nvGrpSpPr>
         <p:cNvPr id="1" name=""/>
@@ -28037,14 +28093,6 @@
 <file path=ppt/slides/slide5.xml><?xml version="1.0" encoding="utf-8"?>
 <p:sld xmlns:a="http://schemas.openxmlformats.org/drawingml/2006/main" xmlns:r="http://schemas.openxmlformats.org/officeDocument/2006/relationships" xmlns:p="http://schemas.openxmlformats.org/presentationml/2006/main">
   <p:cSld name="Slide 5">
-    <p:bg>
-      <p:bgPr>
-        <a:solidFill>
-          <a:srgbClr val="FFFFFF"/>
-        </a:solidFill>
-        <a:effectLst/>
-      </p:bgPr>
-    </p:bg>
     <p:spTree>
       <p:nvGrpSpPr>
         <p:cNvPr id="1" name=""/>
@@ -29112,14 +29160,6 @@
 <file path=ppt/slides/slide6.xml><?xml version="1.0" encoding="utf-8"?>
 <p:sld xmlns:a="http://schemas.openxmlformats.org/drawingml/2006/main" xmlns:r="http://schemas.openxmlformats.org/officeDocument/2006/relationships" xmlns:p="http://schemas.openxmlformats.org/presentationml/2006/main">
   <p:cSld name="Slide 6">
-    <p:bg>
-      <p:bgPr>
-        <a:solidFill>
-          <a:srgbClr val="FFFFFF"/>
-        </a:solidFill>
-        <a:effectLst/>
-      </p:bgPr>
-    </p:bg>
     <p:spTree>
       <p:nvGrpSpPr>
         <p:cNvPr id="1" name=""/>
@@ -30671,14 +30711,6 @@
 <file path=ppt/slides/slide7.xml><?xml version="1.0" encoding="utf-8"?>
 <p:sld xmlns:a="http://schemas.openxmlformats.org/drawingml/2006/main" xmlns:r="http://schemas.openxmlformats.org/officeDocument/2006/relationships" xmlns:p="http://schemas.openxmlformats.org/presentationml/2006/main">
   <p:cSld name="Slide 7">
-    <p:bg>
-      <p:bgPr>
-        <a:solidFill>
-          <a:srgbClr val="FFFFFF"/>
-        </a:solidFill>
-        <a:effectLst/>
-      </p:bgPr>
-    </p:bg>
     <p:spTree>
       <p:nvGrpSpPr>
         <p:cNvPr id="1" name=""/>
@@ -32215,14 +32247,6 @@
 <file path=ppt/slides/slide8.xml><?xml version="1.0" encoding="utf-8"?>
 <p:sld xmlns:a="http://schemas.openxmlformats.org/drawingml/2006/main" xmlns:r="http://schemas.openxmlformats.org/officeDocument/2006/relationships" xmlns:p="http://schemas.openxmlformats.org/presentationml/2006/main">
   <p:cSld name="Slide 8">
-    <p:bg>
-      <p:bgPr>
-        <a:solidFill>
-          <a:srgbClr val="FFFFFF"/>
-        </a:solidFill>
-        <a:effectLst/>
-      </p:bgPr>
-    </p:bg>
     <p:spTree>
       <p:nvGrpSpPr>
         <p:cNvPr id="1" name=""/>
@@ -34714,14 +34738,6 @@
 <file path=ppt/slides/slide9.xml><?xml version="1.0" encoding="utf-8"?>
 <p:sld xmlns:a="http://schemas.openxmlformats.org/drawingml/2006/main" xmlns:r="http://schemas.openxmlformats.org/officeDocument/2006/relationships" xmlns:p="http://schemas.openxmlformats.org/presentationml/2006/main">
   <p:cSld name="Slide 9">
-    <p:bg>
-      <p:bgPr>
-        <a:solidFill>
-          <a:srgbClr val="FFFFFF"/>
-        </a:solidFill>
-        <a:effectLst/>
-      </p:bgPr>
-    </p:bg>
     <p:spTree>
       <p:nvGrpSpPr>
         <p:cNvPr id="1" name=""/>
